--- a/doc/partner/新アプリ切替のご説明_キューテスト様.pptx
+++ b/doc/partner/新アプリ切替のご説明_キューテスト様.pptx
@@ -1362,7 +1362,7 @@
           <a:lstStyle/>
           <a:p>
             <a:r>
-              <a:t>ご質問の答えは、新しいアプリの今の作り(2026年9月時点)に合わせています。</a:t>
+              <a:t>ご質問の答えは、新しいアプリの今の作り(2026年9月時点)に合わせています。個人情報は、保管場所ごとの暗号化に加えて、会社ごとの分離・見られる人の制限・誰がいつ見たかの記録・ログインの回数の制限で守ります。</a:t>
             </a:r>
           </a:p>
         </p:txBody>
@@ -1922,7 +1922,7 @@
           <a:lstStyle/>
           <a:p>
             <a:r>
-              <a:t>暗号化するのは、日報の本文、お子様のアレルギーや配慮事項、ご家族の連絡先や電話番号、メモなど、特に大切な項目です。パスワードの再設定は今と同じく、メールで届く6桁の番号(30分有効)で行います。何度も試せないよう回数も制限しています。</a:t>
+              <a:t>お預かりするデータは、保管場所ごと、つまりデータベースとそのバックアップ、領収書の画像を丸ごと、このアプリ専用の鍵で暗号化します。Google Cloud のディスク暗号化の仕組みで、鍵は Google Cloud の鍵管理サービスで厳重に管理します。医療機関向けの国のガイドライン(3省2ガイドライン)でも一般的な保護の水準ですので、ご安心ください。加えて、会社ごとのデータの分離、見られる人の制限、誰がいつ見たかの記録、ログインの回数の制限で守ります。パスワードの再設定は今と同じく、メールで届く6桁の番号(30分有効)で行います。</a:t>
             </a:r>
           </a:p>
         </p:txBody>
@@ -15886,7 +15886,7 @@
                 <a:ea typeface="IPAPGothic"/>
                 <a:cs typeface="IPAPGothic"/>
               </a:rPr>
-              <a:t>大切な情報の暗号化、会社ごとのデータの分離、操作の記録、同時に直したときの保護。</a:t>
+              <a:t>データを保管場所ごと暗号化、会社ごとのデータの分離、操作の記録、同時に直したときの保護。</a:t>
             </a:r>
           </a:p>
         </p:txBody>
@@ -16278,7 +16278,7 @@
         <p:spPr>
           <a:xfrm>
             <a:off x="548640" y="1371600"/>
-            <a:ext cx="11091672" cy="1444752"/>
+            <a:ext cx="11091672" cy="1115568"/>
           </a:xfrm>
           <a:prstGeom prst="roundRect">
             <a:avLst>
@@ -16321,8 +16321,8 @@
         </p:nvSpPr>
         <p:spPr>
           <a:xfrm>
-            <a:off x="777240" y="1572768"/>
-            <a:ext cx="566928" cy="566928"/>
+            <a:off x="777240" y="1481328"/>
+            <a:ext cx="512064" cy="512064"/>
           </a:xfrm>
           <a:prstGeom prst="ellipse">
             <a:avLst/>
@@ -16355,7 +16355,7 @@
           <a:p>
             <a:pPr algn="ctr"/>
             <a:r>
-              <a:rPr sz="2200" b="1">
+              <a:rPr sz="2000" b="1">
                 <a:solidFill>
                   <a:srgbClr val="FFFFFF"/>
                 </a:solidFill>
@@ -16376,7 +16376,49 @@
         </p:nvSpPr>
         <p:spPr>
           <a:xfrm>
-            <a:off x="1554480" y="1536192"/>
+            <a:off x="1554480" y="1444752"/>
+            <a:ext cx="9875520" cy="457200"/>
+          </a:xfrm>
+          <a:prstGeom prst="rect">
+            <a:avLst/>
+          </a:prstGeom>
+          <a:noFill/>
+        </p:spPr>
+        <p:txBody>
+          <a:bodyPr wrap="square" anchor="ctr" lIns="0" rIns="0" tIns="0" bIns="0"/>
+          <a:lstStyle/>
+          <a:p>
+            <a:pPr algn="l">
+              <a:lnSpc>
+                <a:spcPct val="115000"/>
+              </a:lnSpc>
+              <a:spcAft>
+                <a:spcPts val="600"/>
+              </a:spcAft>
+            </a:pPr>
+            <a:r>
+              <a:rPr sz="2000" b="1">
+                <a:solidFill>
+                  <a:srgbClr val="0E4F5C"/>
+                </a:solidFill>
+                <a:latin typeface="IPAPGothic"/>
+                <a:ea typeface="IPAPGothic"/>
+                <a:cs typeface="IPAPGothic"/>
+              </a:rPr>
+              <a:t>お子様やご家族の情報は安全ですか?</a:t>
+            </a:r>
+          </a:p>
+        </p:txBody>
+      </p:sp>
+      <p:sp>
+        <p:nvSpPr>
+          <p:cNvPr id="9" name="TextBox 8"/>
+          <p:cNvSpPr txBox="1"/>
+          <p:nvPr/>
+        </p:nvSpPr>
+        <p:spPr>
+          <a:xfrm>
+            <a:off x="1554480" y="1883664"/>
             <a:ext cx="9875520" cy="566928"/>
           </a:xfrm>
           <a:prstGeom prst="rect">
@@ -16385,7 +16427,7 @@
           <a:noFill/>
         </p:spPr>
         <p:txBody>
-          <a:bodyPr wrap="square" anchor="ctr" lIns="0" rIns="0" tIns="0" bIns="0"/>
+          <a:bodyPr wrap="square" anchor="t" lIns="0" rIns="0" tIns="0" bIns="0"/>
           <a:lstStyle/>
           <a:p>
             <a:pPr algn="l">
@@ -16397,49 +16439,7 @@
               </a:spcAft>
             </a:pPr>
             <a:r>
-              <a:rPr sz="2100" b="1">
-                <a:solidFill>
-                  <a:srgbClr val="0E4F5C"/>
-                </a:solidFill>
-                <a:latin typeface="IPAPGothic"/>
-                <a:ea typeface="IPAPGothic"/>
-                <a:cs typeface="IPAPGothic"/>
-              </a:rPr>
-              <a:t>今までのデータは消えませんか?</a:t>
-            </a:r>
-          </a:p>
-        </p:txBody>
-      </p:sp>
-      <p:sp>
-        <p:nvSpPr>
-          <p:cNvPr id="9" name="TextBox 8"/>
-          <p:cNvSpPr txBox="1"/>
-          <p:nvPr/>
-        </p:nvSpPr>
-        <p:spPr>
-          <a:xfrm>
-            <a:off x="1554480" y="2084832"/>
-            <a:ext cx="9875520" cy="713232"/>
-          </a:xfrm>
-          <a:prstGeom prst="rect">
-            <a:avLst/>
-          </a:prstGeom>
-          <a:noFill/>
-        </p:spPr>
-        <p:txBody>
-          <a:bodyPr wrap="square" anchor="t" lIns="0" rIns="0" tIns="0" bIns="0"/>
-          <a:lstStyle/>
-          <a:p>
-            <a:pPr algn="l">
-              <a:lnSpc>
-                <a:spcPct val="120000"/>
-              </a:lnSpc>
-              <a:spcAft>
-                <a:spcPts val="600"/>
-              </a:spcAft>
-            </a:pPr>
-            <a:r>
-              <a:rPr sz="1700" b="0">
+              <a:rPr sz="1600" b="0">
                 <a:solidFill>
                   <a:srgbClr val="1F2D33"/>
                 </a:solidFill>
@@ -16447,7 +16447,7 @@
                 <a:ea typeface="IPAPGothic"/>
                 <a:cs typeface="IPAPGothic"/>
               </a:rPr>
-              <a:t>消えません。スタッフ・お客様・今月の出勤簿を取り込んでから切り替えます。今のスプレッドシートも消さずに残します。</a:t>
+              <a:t>データは保管場所(データベースとそのバックアップ、領収書の画像)ごと、このアプリ専用の鍵で暗号化します。医療機関向けの国のガイドラインでも一般的な保護の水準です。</a:t>
             </a:r>
           </a:p>
         </p:txBody>
@@ -16460,8 +16460,8 @@
         </p:nvSpPr>
         <p:spPr>
           <a:xfrm>
-            <a:off x="548640" y="2971800"/>
-            <a:ext cx="11091672" cy="1444752"/>
+            <a:off x="548640" y="2569464"/>
+            <a:ext cx="11091672" cy="1115568"/>
           </a:xfrm>
           <a:prstGeom prst="roundRect">
             <a:avLst>
@@ -16504,8 +16504,8 @@
         </p:nvSpPr>
         <p:spPr>
           <a:xfrm>
-            <a:off x="777240" y="3172968"/>
-            <a:ext cx="566928" cy="566928"/>
+            <a:off x="777240" y="2679192"/>
+            <a:ext cx="512064" cy="512064"/>
           </a:xfrm>
           <a:prstGeom prst="ellipse">
             <a:avLst/>
@@ -16538,7 +16538,7 @@
           <a:p>
             <a:pPr algn="ctr"/>
             <a:r>
-              <a:rPr sz="2200" b="1">
+              <a:rPr sz="2000" b="1">
                 <a:solidFill>
                   <a:srgbClr val="FFFFFF"/>
                 </a:solidFill>
@@ -16559,7 +16559,49 @@
         </p:nvSpPr>
         <p:spPr>
           <a:xfrm>
-            <a:off x="1554480" y="3136392"/>
+            <a:off x="1554480" y="2642616"/>
+            <a:ext cx="9875520" cy="457200"/>
+          </a:xfrm>
+          <a:prstGeom prst="rect">
+            <a:avLst/>
+          </a:prstGeom>
+          <a:noFill/>
+        </p:spPr>
+        <p:txBody>
+          <a:bodyPr wrap="square" anchor="ctr" lIns="0" rIns="0" tIns="0" bIns="0"/>
+          <a:lstStyle/>
+          <a:p>
+            <a:pPr algn="l">
+              <a:lnSpc>
+                <a:spcPct val="115000"/>
+              </a:lnSpc>
+              <a:spcAft>
+                <a:spcPts val="600"/>
+              </a:spcAft>
+            </a:pPr>
+            <a:r>
+              <a:rPr sz="2000" b="1">
+                <a:solidFill>
+                  <a:srgbClr val="0E4F5C"/>
+                </a:solidFill>
+                <a:latin typeface="IPAPGothic"/>
+                <a:ea typeface="IPAPGothic"/>
+                <a:cs typeface="IPAPGothic"/>
+              </a:rPr>
+              <a:t>今までのデータは消えませんか?</a:t>
+            </a:r>
+          </a:p>
+        </p:txBody>
+      </p:sp>
+      <p:sp>
+        <p:nvSpPr>
+          <p:cNvPr id="13" name="TextBox 12"/>
+          <p:cNvSpPr txBox="1"/>
+          <p:nvPr/>
+        </p:nvSpPr>
+        <p:spPr>
+          <a:xfrm>
+            <a:off x="1554480" y="3081528"/>
             <a:ext cx="9875520" cy="566928"/>
           </a:xfrm>
           <a:prstGeom prst="rect">
@@ -16568,7 +16610,7 @@
           <a:noFill/>
         </p:spPr>
         <p:txBody>
-          <a:bodyPr wrap="square" anchor="ctr" lIns="0" rIns="0" tIns="0" bIns="0"/>
+          <a:bodyPr wrap="square" anchor="t" lIns="0" rIns="0" tIns="0" bIns="0"/>
           <a:lstStyle/>
           <a:p>
             <a:pPr algn="l">
@@ -16580,49 +16622,7 @@
               </a:spcAft>
             </a:pPr>
             <a:r>
-              <a:rPr sz="2100" b="1">
-                <a:solidFill>
-                  <a:srgbClr val="0E4F5C"/>
-                </a:solidFill>
-                <a:latin typeface="IPAPGothic"/>
-                <a:ea typeface="IPAPGothic"/>
-                <a:cs typeface="IPAPGothic"/>
-              </a:rPr>
-              <a:t>スプレッドシートは今後も見られますか?</a:t>
-            </a:r>
-          </a:p>
-        </p:txBody>
-      </p:sp>
-      <p:sp>
-        <p:nvSpPr>
-          <p:cNvPr id="13" name="TextBox 12"/>
-          <p:cNvSpPr txBox="1"/>
-          <p:nvPr/>
-        </p:nvSpPr>
-        <p:spPr>
-          <a:xfrm>
-            <a:off x="1554480" y="3685032"/>
-            <a:ext cx="9875520" cy="713232"/>
-          </a:xfrm>
-          <a:prstGeom prst="rect">
-            <a:avLst/>
-          </a:prstGeom>
-          <a:noFill/>
-        </p:spPr>
-        <p:txBody>
-          <a:bodyPr wrap="square" anchor="t" lIns="0" rIns="0" tIns="0" bIns="0"/>
-          <a:lstStyle/>
-          <a:p>
-            <a:pPr algn="l">
-              <a:lnSpc>
-                <a:spcPct val="120000"/>
-              </a:lnSpc>
-              <a:spcAft>
-                <a:spcPts val="600"/>
-              </a:spcAft>
-            </a:pPr>
-            <a:r>
-              <a:rPr sz="1700" b="0">
+              <a:rPr sz="1600" b="0">
                 <a:solidFill>
                   <a:srgbClr val="1F2D33"/>
                 </a:solidFill>
@@ -16630,7 +16630,7 @@
                 <a:ea typeface="IPAPGothic"/>
                 <a:cs typeface="IPAPGothic"/>
               </a:rPr>
-              <a:t>これまでの分はそのまま見られます。切替後の記録もシートに書き写すかは選べます(続ける場合は今のアプリ側の準備が必要です)。</a:t>
+              <a:t>消えません。スタッフ・お客様・今月の出勤簿を取り込んでから切り替えます。今のスプレッドシートも消さずに残します。</a:t>
             </a:r>
           </a:p>
         </p:txBody>
@@ -16643,8 +16643,8 @@
         </p:nvSpPr>
         <p:spPr>
           <a:xfrm>
-            <a:off x="548640" y="4572000"/>
-            <a:ext cx="11091672" cy="1444752"/>
+            <a:off x="548640" y="3767328"/>
+            <a:ext cx="11091672" cy="1115568"/>
           </a:xfrm>
           <a:prstGeom prst="roundRect">
             <a:avLst>
@@ -16687,8 +16687,8 @@
         </p:nvSpPr>
         <p:spPr>
           <a:xfrm>
-            <a:off x="777240" y="4773168"/>
-            <a:ext cx="566928" cy="566928"/>
+            <a:off x="777240" y="3877056"/>
+            <a:ext cx="512064" cy="512064"/>
           </a:xfrm>
           <a:prstGeom prst="ellipse">
             <a:avLst/>
@@ -16721,7 +16721,7 @@
           <a:p>
             <a:pPr algn="ctr"/>
             <a:r>
-              <a:rPr sz="2200" b="1">
+              <a:rPr sz="2000" b="1">
                 <a:solidFill>
                   <a:srgbClr val="FFFFFF"/>
                 </a:solidFill>
@@ -16742,7 +16742,49 @@
         </p:nvSpPr>
         <p:spPr>
           <a:xfrm>
-            <a:off x="1554480" y="4736592"/>
+            <a:off x="1554480" y="3840480"/>
+            <a:ext cx="9875520" cy="457200"/>
+          </a:xfrm>
+          <a:prstGeom prst="rect">
+            <a:avLst/>
+          </a:prstGeom>
+          <a:noFill/>
+        </p:spPr>
+        <p:txBody>
+          <a:bodyPr wrap="square" anchor="ctr" lIns="0" rIns="0" tIns="0" bIns="0"/>
+          <a:lstStyle/>
+          <a:p>
+            <a:pPr algn="l">
+              <a:lnSpc>
+                <a:spcPct val="115000"/>
+              </a:lnSpc>
+              <a:spcAft>
+                <a:spcPts val="600"/>
+              </a:spcAft>
+            </a:pPr>
+            <a:r>
+              <a:rPr sz="2000" b="1">
+                <a:solidFill>
+                  <a:srgbClr val="0E4F5C"/>
+                </a:solidFill>
+                <a:latin typeface="IPAPGothic"/>
+                <a:ea typeface="IPAPGothic"/>
+                <a:cs typeface="IPAPGothic"/>
+              </a:rPr>
+              <a:t>スプレッドシートは今後も見られますか?</a:t>
+            </a:r>
+          </a:p>
+        </p:txBody>
+      </p:sp>
+      <p:sp>
+        <p:nvSpPr>
+          <p:cNvPr id="17" name="TextBox 16"/>
+          <p:cNvSpPr txBox="1"/>
+          <p:nvPr/>
+        </p:nvSpPr>
+        <p:spPr>
+          <a:xfrm>
+            <a:off x="1554480" y="4279392"/>
             <a:ext cx="9875520" cy="566928"/>
           </a:xfrm>
           <a:prstGeom prst="rect">
@@ -16751,6 +16793,147 @@
           <a:noFill/>
         </p:spPr>
         <p:txBody>
+          <a:bodyPr wrap="square" anchor="t" lIns="0" rIns="0" tIns="0" bIns="0"/>
+          <a:lstStyle/>
+          <a:p>
+            <a:pPr algn="l">
+              <a:lnSpc>
+                <a:spcPct val="115000"/>
+              </a:lnSpc>
+              <a:spcAft>
+                <a:spcPts val="600"/>
+              </a:spcAft>
+            </a:pPr>
+            <a:r>
+              <a:rPr sz="1600" b="0">
+                <a:solidFill>
+                  <a:srgbClr val="1F2D33"/>
+                </a:solidFill>
+                <a:latin typeface="IPAPGothic"/>
+                <a:ea typeface="IPAPGothic"/>
+                <a:cs typeface="IPAPGothic"/>
+              </a:rPr>
+              <a:t>これまでの分はそのまま見られます。切替後の記録もシートに書き写すかは選べます(続ける場合は今のアプリ側の準備が必要です)。</a:t>
+            </a:r>
+          </a:p>
+        </p:txBody>
+      </p:sp>
+      <p:sp>
+        <p:nvSpPr>
+          <p:cNvPr id="18" name="Rounded Rectangle 17"/>
+          <p:cNvSpPr/>
+          <p:nvPr/>
+        </p:nvSpPr>
+        <p:spPr>
+          <a:xfrm>
+            <a:off x="548640" y="4965192"/>
+            <a:ext cx="11091672" cy="1115568"/>
+          </a:xfrm>
+          <a:prstGeom prst="roundRect">
+            <a:avLst>
+              <a:gd name="adj" fmla="val 8000"/>
+            </a:avLst>
+          </a:prstGeom>
+          <a:solidFill>
+            <a:srgbClr val="E8F5F4"/>
+          </a:solidFill>
+          <a:ln>
+            <a:noFill/>
+          </a:ln>
+          <a:effectLst/>
+        </p:spPr>
+        <p:style>
+          <a:lnRef idx="1">
+            <a:schemeClr val="accent1"/>
+          </a:lnRef>
+          <a:fillRef idx="3">
+            <a:schemeClr val="accent1"/>
+          </a:fillRef>
+          <a:effectRef idx="2">
+            <a:schemeClr val="accent1"/>
+          </a:effectRef>
+          <a:fontRef idx="minor">
+            <a:schemeClr val="lt1"/>
+          </a:fontRef>
+        </p:style>
+        <p:txBody>
+          <a:bodyPr rtlCol="0" anchor="ctr"/>
+          <a:lstStyle/>
+          <a:p/>
+        </p:txBody>
+      </p:sp>
+      <p:sp>
+        <p:nvSpPr>
+          <p:cNvPr id="19" name="Oval 18"/>
+          <p:cNvSpPr/>
+          <p:nvPr/>
+        </p:nvSpPr>
+        <p:spPr>
+          <a:xfrm>
+            <a:off x="777240" y="5074920"/>
+            <a:ext cx="512064" cy="512064"/>
+          </a:xfrm>
+          <a:prstGeom prst="ellipse">
+            <a:avLst/>
+          </a:prstGeom>
+          <a:solidFill>
+            <a:srgbClr val="1F8A8A"/>
+          </a:solidFill>
+          <a:ln>
+            <a:noFill/>
+          </a:ln>
+          <a:effectLst/>
+        </p:spPr>
+        <p:style>
+          <a:lnRef idx="1">
+            <a:schemeClr val="accent1"/>
+          </a:lnRef>
+          <a:fillRef idx="3">
+            <a:schemeClr val="accent1"/>
+          </a:fillRef>
+          <a:effectRef idx="2">
+            <a:schemeClr val="accent1"/>
+          </a:effectRef>
+          <a:fontRef idx="minor">
+            <a:schemeClr val="lt1"/>
+          </a:fontRef>
+        </p:style>
+        <p:txBody>
+          <a:bodyPr rtlCol="0" anchor="ctr" lIns="0" rIns="0" tIns="0" bIns="0"/>
+          <a:lstStyle/>
+          <a:p>
+            <a:pPr algn="ctr"/>
+            <a:r>
+              <a:rPr sz="2000" b="1">
+                <a:solidFill>
+                  <a:srgbClr val="FFFFFF"/>
+                </a:solidFill>
+                <a:latin typeface="IPAPGothic"/>
+                <a:ea typeface="IPAPGothic"/>
+                <a:cs typeface="IPAPGothic"/>
+              </a:rPr>
+              <a:t>Q</a:t>
+            </a:r>
+          </a:p>
+        </p:txBody>
+      </p:sp>
+      <p:sp>
+        <p:nvSpPr>
+          <p:cNvPr id="20" name="TextBox 19"/>
+          <p:cNvSpPr txBox="1"/>
+          <p:nvPr/>
+        </p:nvSpPr>
+        <p:spPr>
+          <a:xfrm>
+            <a:off x="1554480" y="5038344"/>
+            <a:ext cx="9875520" cy="457200"/>
+          </a:xfrm>
+          <a:prstGeom prst="rect">
+            <a:avLst/>
+          </a:prstGeom>
+          <a:noFill/>
+        </p:spPr>
+        <p:txBody>
           <a:bodyPr wrap="square" anchor="ctr" lIns="0" rIns="0" tIns="0" bIns="0"/>
           <a:lstStyle/>
           <a:p>
@@ -16763,7 +16946,7 @@
               </a:spcAft>
             </a:pPr>
             <a:r>
-              <a:rPr sz="2100" b="1">
+              <a:rPr sz="2000" b="1">
                 <a:solidFill>
                   <a:srgbClr val="0E4F5C"/>
                 </a:solidFill>
@@ -16778,14 +16961,14 @@
       </p:sp>
       <p:sp>
         <p:nvSpPr>
-          <p:cNvPr id="17" name="TextBox 16"/>
-          <p:cNvSpPr txBox="1"/>
-          <p:nvPr/>
-        </p:nvSpPr>
-        <p:spPr>
-          <a:xfrm>
-            <a:off x="1554480" y="5285232"/>
-            <a:ext cx="9875520" cy="713232"/>
+          <p:cNvPr id="21" name="TextBox 20"/>
+          <p:cNvSpPr txBox="1"/>
+          <p:nvPr/>
+        </p:nvSpPr>
+        <p:spPr>
+          <a:xfrm>
+            <a:off x="1554480" y="5477256"/>
+            <a:ext cx="9875520" cy="566928"/>
           </a:xfrm>
           <a:prstGeom prst="rect">
             <a:avLst/>
@@ -16798,14 +16981,14 @@
           <a:p>
             <a:pPr algn="l">
               <a:lnSpc>
-                <a:spcPct val="120000"/>
+                <a:spcPct val="115000"/>
               </a:lnSpc>
               <a:spcAft>
                 <a:spcPts val="600"/>
               </a:spcAft>
             </a:pPr>
             <a:r>
-              <a:rPr sz="1700" b="0">
+              <a:rPr sz="1600" b="0">
                 <a:solidFill>
                   <a:srgbClr val="1F2D33"/>
                 </a:solidFill>
@@ -24000,7 +24183,7 @@
         <p:spPr>
           <a:xfrm>
             <a:off x="548640" y="1371600"/>
-            <a:ext cx="5440680" cy="1417320"/>
+            <a:ext cx="11045952" cy="1691640"/>
           </a:xfrm>
           <a:prstGeom prst="roundRect">
             <a:avLst>
@@ -24043,7 +24226,7 @@
         </p:nvSpPr>
         <p:spPr>
           <a:xfrm>
-            <a:off x="777240" y="1691640"/>
+            <a:off x="777240" y="1851660"/>
             <a:ext cx="731520" cy="731520"/>
           </a:xfrm>
           <a:prstGeom prst="ellipse">
@@ -24099,7 +24282,7 @@
         <p:spPr>
           <a:xfrm>
             <a:off x="1691640" y="1481328"/>
-            <a:ext cx="4114800" cy="457200"/>
+            <a:ext cx="9720072" cy="457200"/>
           </a:xfrm>
           <a:prstGeom prst="rect">
             <a:avLst/>
@@ -24127,7 +24310,7 @@
                 <a:ea typeface="IPAPGothic"/>
                 <a:cs typeface="IPAPGothic"/>
               </a:rPr>
-              <a:t>大切な情報は暗号化</a:t>
+              <a:t>データは保管場所ごと、このアプリ専用の鍵で暗号化</a:t>
             </a:r>
           </a:p>
         </p:txBody>
@@ -24141,7 +24324,7 @@
         <p:spPr>
           <a:xfrm>
             <a:off x="1691640" y="1938528"/>
-            <a:ext cx="4114800" cy="822960"/>
+            <a:ext cx="9720072" cy="1051560"/>
           </a:xfrm>
           <a:prstGeom prst="rect">
             <a:avLst/>
@@ -24169,7 +24352,7 @@
                 <a:ea typeface="IPAPGothic"/>
                 <a:cs typeface="IPAPGothic"/>
               </a:rPr>
-              <a:t>日報の本文、お子様のアレルギー、連絡先の電話番号などは暗号にして保存</a:t>
+              <a:t>データベースとそのバックアップ、領収書の画像を丸ごと暗号化します(Google Cloudのディスク暗号化。鍵はGoogle Cloudの鍵管理サービスで厳重に管理)。医療機関向けの国のガイドライン(3省2ガイドライン)でも一般的な保護の水準です</a:t>
             </a:r>
           </a:p>
         </p:txBody>
@@ -24182,8 +24365,8 @@
         </p:nvSpPr>
         <p:spPr>
           <a:xfrm>
-            <a:off x="6153912" y="1371600"/>
-            <a:ext cx="5440680" cy="1417320"/>
+            <a:off x="548640" y="3200400"/>
+            <a:ext cx="5440680" cy="1325880"/>
           </a:xfrm>
           <a:prstGeom prst="roundRect">
             <a:avLst>
@@ -24226,7 +24409,7 @@
         </p:nvSpPr>
         <p:spPr>
           <a:xfrm>
-            <a:off x="6382512" y="1691640"/>
+            <a:off x="777240" y="3497580"/>
             <a:ext cx="731520" cy="731520"/>
           </a:xfrm>
           <a:prstGeom prst="ellipse">
@@ -24281,7 +24464,7 @@
         </p:nvSpPr>
         <p:spPr>
           <a:xfrm>
-            <a:off x="7296912" y="1481328"/>
+            <a:off x="1691640" y="3310128"/>
             <a:ext cx="4114800" cy="457200"/>
           </a:xfrm>
           <a:prstGeom prst="rect">
@@ -24323,8 +24506,8 @@
         </p:nvSpPr>
         <p:spPr>
           <a:xfrm>
-            <a:off x="7296912" y="1938528"/>
-            <a:ext cx="4114800" cy="822960"/>
+            <a:off x="1691640" y="3767328"/>
+            <a:ext cx="4114800" cy="685800"/>
           </a:xfrm>
           <a:prstGeom prst="rect">
             <a:avLst/>
@@ -24365,8 +24548,8 @@
         </p:nvSpPr>
         <p:spPr>
           <a:xfrm>
-            <a:off x="548640" y="2944368"/>
-            <a:ext cx="5440680" cy="1417320"/>
+            <a:off x="6153912" y="3200400"/>
+            <a:ext cx="5440680" cy="1325880"/>
           </a:xfrm>
           <a:prstGeom prst="roundRect">
             <a:avLst>
@@ -24409,7 +24592,7 @@
         </p:nvSpPr>
         <p:spPr>
           <a:xfrm>
-            <a:off x="777240" y="3264408"/>
+            <a:off x="6382512" y="3497580"/>
             <a:ext cx="731520" cy="731520"/>
           </a:xfrm>
           <a:prstGeom prst="ellipse">
@@ -24451,7 +24634,7 @@
                 <a:ea typeface="IPAPGothic"/>
                 <a:cs typeface="IPAPGothic"/>
               </a:rPr>
-              <a:t>記</a:t>
+              <a:t>人</a:t>
             </a:r>
           </a:p>
         </p:txBody>
@@ -24464,7 +24647,7 @@
         </p:nvSpPr>
         <p:spPr>
           <a:xfrm>
-            <a:off x="1691640" y="3054096"/>
+            <a:off x="7296912" y="3310128"/>
             <a:ext cx="4114800" cy="457200"/>
           </a:xfrm>
           <a:prstGeom prst="rect">
@@ -24493,7 +24676,7 @@
                 <a:ea typeface="IPAPGothic"/>
                 <a:cs typeface="IPAPGothic"/>
               </a:rPr>
-              <a:t>操作の記録</a:t>
+              <a:t>見られる人を制限</a:t>
             </a:r>
           </a:p>
         </p:txBody>
@@ -24506,8 +24689,8 @@
         </p:nvSpPr>
         <p:spPr>
           <a:xfrm>
-            <a:off x="1691640" y="3511296"/>
-            <a:ext cx="4114800" cy="822960"/>
+            <a:off x="7296912" y="3767328"/>
+            <a:ext cx="4114800" cy="685800"/>
           </a:xfrm>
           <a:prstGeom prst="rect">
             <a:avLst/>
@@ -24535,7 +24718,7 @@
                 <a:ea typeface="IPAPGothic"/>
                 <a:cs typeface="IPAPGothic"/>
               </a:rPr>
-              <a:t>誰が・いつ・何をしたかを残します。日報を書き直しても、前の内容が履歴に残ります</a:t>
+              <a:t>スタッフが見て直せるのは自分の予定・出勤簿だけ。他の人の日報は上書きできません</a:t>
             </a:r>
           </a:p>
         </p:txBody>
@@ -24548,8 +24731,8 @@
         </p:nvSpPr>
         <p:spPr>
           <a:xfrm>
-            <a:off x="6153912" y="2944368"/>
-            <a:ext cx="5440680" cy="1417320"/>
+            <a:off x="548640" y="4663440"/>
+            <a:ext cx="5440680" cy="1325880"/>
           </a:xfrm>
           <a:prstGeom prst="roundRect">
             <a:avLst>
@@ -24592,7 +24775,7 @@
         </p:nvSpPr>
         <p:spPr>
           <a:xfrm>
-            <a:off x="6382512" y="3264408"/>
+            <a:off x="777240" y="4960620"/>
             <a:ext cx="731520" cy="731520"/>
           </a:xfrm>
           <a:prstGeom prst="ellipse">
@@ -24634,7 +24817,7 @@
                 <a:ea typeface="IPAPGothic"/>
                 <a:cs typeface="IPAPGothic"/>
               </a:rPr>
-              <a:t>人</a:t>
+              <a:t>記</a:t>
             </a:r>
           </a:p>
         </p:txBody>
@@ -24647,7 +24830,7 @@
         </p:nvSpPr>
         <p:spPr>
           <a:xfrm>
-            <a:off x="7296912" y="3054096"/>
+            <a:off x="1691640" y="4773168"/>
             <a:ext cx="4114800" cy="457200"/>
           </a:xfrm>
           <a:prstGeom prst="rect">
@@ -24676,7 +24859,7 @@
                 <a:ea typeface="IPAPGothic"/>
                 <a:cs typeface="IPAPGothic"/>
               </a:rPr>
-              <a:t>見られる範囲を守る</a:t>
+              <a:t>誰がいつ見たかを記録</a:t>
             </a:r>
           </a:p>
         </p:txBody>
@@ -24689,8 +24872,8 @@
         </p:nvSpPr>
         <p:spPr>
           <a:xfrm>
-            <a:off x="7296912" y="3511296"/>
-            <a:ext cx="4114800" cy="822960"/>
+            <a:off x="1691640" y="5230368"/>
+            <a:ext cx="4114800" cy="685800"/>
           </a:xfrm>
           <a:prstGeom prst="rect">
             <a:avLst/>
@@ -24718,7 +24901,7 @@
                 <a:ea typeface="IPAPGothic"/>
                 <a:cs typeface="IPAPGothic"/>
               </a:rPr>
-              <a:t>スタッフが見て直せるのは自分の予定・出勤簿だけ。他の人の日報は上書きできません</a:t>
+              <a:t>誰が・いつ・何を見たか、何をしたかを残します。日報を書き直しても、前の内容が履歴に残ります</a:t>
             </a:r>
           </a:p>
         </p:txBody>
@@ -24731,8 +24914,8 @@
         </p:nvSpPr>
         <p:spPr>
           <a:xfrm>
-            <a:off x="548640" y="4517136"/>
-            <a:ext cx="11045952" cy="1417320"/>
+            <a:off x="6153912" y="4663440"/>
+            <a:ext cx="5440680" cy="1325880"/>
           </a:xfrm>
           <a:prstGeom prst="roundRect">
             <a:avLst>
@@ -24775,7 +24958,7 @@
         </p:nvSpPr>
         <p:spPr>
           <a:xfrm>
-            <a:off x="777240" y="4837175"/>
+            <a:off x="6382512" y="4960620"/>
             <a:ext cx="731520" cy="731520"/>
           </a:xfrm>
           <a:prstGeom prst="ellipse">
@@ -24830,8 +25013,8 @@
         </p:nvSpPr>
         <p:spPr>
           <a:xfrm>
-            <a:off x="1691640" y="4626864"/>
-            <a:ext cx="9720072" cy="457200"/>
+            <a:off x="7296912" y="4773168"/>
+            <a:ext cx="4114800" cy="457200"/>
           </a:xfrm>
           <a:prstGeom prst="rect">
             <a:avLst/>
@@ -24859,7 +25042,7 @@
                 <a:ea typeface="IPAPGothic"/>
                 <a:cs typeface="IPAPGothic"/>
               </a:rPr>
-              <a:t>パスワードを守る</a:t>
+              <a:t>ログインの回数を制限</a:t>
             </a:r>
           </a:p>
         </p:txBody>
@@ -24872,8 +25055,8 @@
         </p:nvSpPr>
         <p:spPr>
           <a:xfrm>
-            <a:off x="1691640" y="5084064"/>
-            <a:ext cx="9720072" cy="822960"/>
+            <a:off x="7296912" y="5230368"/>
+            <a:ext cx="4114800" cy="685800"/>
           </a:xfrm>
           <a:prstGeom prst="rect">
             <a:avLst/>
@@ -24901,7 +25084,7 @@
                 <a:ea typeface="IPAPGothic"/>
                 <a:cs typeface="IPAPGothic"/>
               </a:rPr>
-              <a:t>安全な方式で保存。続けて間違えると一時的にロック。再設定はメールの6桁の番号で(今と同じ)</a:t>
+              <a:t>続けて間違えると一時的にロックします。パスワードも安全な方式で保存します</a:t>
             </a:r>
           </a:p>
         </p:txBody>

--- a/doc/partner/新アプリ切替のご説明_キューテスト様.pptx
+++ b/doc/partner/新アプリ切替のご説明_キューテスト様.pptx
@@ -1362,7 +1362,7 @@
           <a:lstStyle/>
           <a:p>
             <a:r>
-              <a:t>ご質問の答えは、新しいアプリの今の作り(2026年9月時点)に合わせています。個人情報は、保管場所ごとの暗号化に加えて、会社ごとの分離・見られる人の制限・誰がいつ見たかの記録・ログインの回数の制限で守ります。</a:t>
+              <a:t>ご質問の答えは、新しいアプリの今の作り(2026年9月時点)に合わせています。個人情報は、保管場所ごとの暗号化に加えて、会社ごとの分離・役割ごとにできることの制限・お客様の情報を誰がいつ開いたかの記録・ログインの回数の制限で守ります。</a:t>
             </a:r>
           </a:p>
         </p:txBody>
@@ -1922,7 +1922,7 @@
           <a:lstStyle/>
           <a:p>
             <a:r>
-              <a:t>お預かりするデータは、保管場所ごと、つまりデータベースとそのバックアップ、領収書の画像を丸ごと、このアプリ専用の鍵で暗号化します。Google Cloud のディスク暗号化の仕組みで、鍵は Google Cloud の鍵管理サービスで厳重に管理します。医療機関向けの国のガイドライン(3省2ガイドライン)でも一般的な保護の水準ですので、ご安心ください。加えて、会社ごとのデータの分離、見られる人の制限、誰がいつ見たかの記録、ログインの回数の制限で守ります。パスワードの再設定は今と同じく、メールで届く6桁の番号(30分有効)で行います。</a:t>
+              <a:t>お預かりするデータは、保管場所ごと、つまりデータベースとそのバックアップ、領収書の画像を丸ごと、このアプリ専用の鍵で暗号化します。Google Cloud の保存データの暗号化の仕組みで、鍵は Google Cloud の鍵管理サービスで厳重に管理します。医療機関向けの国のガイドライン(3省2ガイドライン)でも一般的な保護の水準ですので、ご安心ください。ガイドラインの認証を受けたという意味ではありません。加えて、会社ごとのデータの分離、役割ごとにできることの制限、お客様の情報を誰がいつ開いたかの記録、ログインの回数の制限で守ります。パスワードの再設定は今と同じく、メールで届く6桁の番号(30分有効)で行います。</a:t>
             </a:r>
           </a:p>
         </p:txBody>
@@ -5175,7 +5175,7 @@
                 <a:ea typeface="IPAPGothic"/>
                 <a:cs typeface="IPAPGothic"/>
               </a:rPr>
-              <a:t>いまお使いの「保育日報」アプリ(Googleスプレッドシート版)からの切り替えのご案内です</a:t>
+              <a:t>いまお使いの「保育日報」アプリ(Googleスプレッドシート版）からの切り替えのご案内です</a:t>
             </a:r>
           </a:p>
         </p:txBody>
@@ -5737,7 +5737,7 @@
                 <a:ea typeface="IPAPGothic"/>
                 <a:cs typeface="IPAPGothic"/>
               </a:rPr>
-              <a:t>出勤簿を直せるのは今月分だけ(今と同じ)。締めた月は、データベースが変更を受け付けません</a:t>
+              <a:t>出勤簿を直せるのは今月分だけ（今と同じ）。締めた月は、データベースが変更を受け付けません</a:t>
             </a:r>
           </a:p>
         </p:txBody>
@@ -5920,7 +5920,7 @@
                 <a:ea typeface="IPAPGothic"/>
                 <a:cs typeface="IPAPGothic"/>
               </a:rPr>
-              <a:t>同じ領収書を二度送っても一度だけ登録(今と同じ判定)。夜の処理はやり直しても二重になりません</a:t>
+              <a:t>同じ領収書を二度送っても一度だけ登録（今と同じ判定）。夜の処理はやり直しても二重になりません</a:t>
             </a:r>
           </a:p>
         </p:txBody>
@@ -8691,7 +8691,7 @@
                 <a:ea typeface="IPAPGothic"/>
                 <a:cs typeface="IPAPGothic"/>
               </a:rPr>
-              <a:t>アプリのURL(ホーム画面に追加し直します)</a:t>
+              <a:t>アプリのURL（ホーム画面に追加し直します）</a:t>
             </a:r>
           </a:p>
           <a:p>
@@ -8723,7 +8723,7 @@
                 <a:ea typeface="IPAPGothic"/>
                 <a:cs typeface="IPAPGothic"/>
               </a:rPr>
-              <a:t>記録の正本はデータベースに(今はシート)</a:t>
+              <a:t>記録の正本はデータベースに（今はシート）</a:t>
             </a:r>
           </a:p>
           <a:p>
@@ -8755,7 +8755,7 @@
                 <a:ea typeface="IPAPGothic"/>
                 <a:cs typeface="IPAPGothic"/>
               </a:rPr>
-              <a:t>シートへの書き写しは必要な間だけ(選べます)</a:t>
+              <a:t>シートへの書き写しは必要な間だけ（選べます）</a:t>
             </a:r>
           </a:p>
           <a:p>
@@ -8787,7 +8787,7 @@
                 <a:ea typeface="IPAPGothic"/>
                 <a:cs typeface="IPAPGothic"/>
               </a:rPr>
-              <a:t>毎月のクラウド利用料がかかります(15ページ)</a:t>
+              <a:t>毎月のクラウド利用料がかかります(18ページ）</a:t>
             </a:r>
           </a:p>
           <a:p>
@@ -8929,7 +8929,7 @@
                 <a:ea typeface="IPAPGothic"/>
                 <a:cs typeface="IPAPGothic"/>
               </a:rPr>
-              <a:t>データの引っ越し(移行)の流れ</a:t>
+              <a:t>データの引っ越し（移行）の流れ</a:t>
             </a:r>
           </a:p>
         </p:txBody>
@@ -10317,7 +10317,7 @@
                 <a:ea typeface="IPAPGothic"/>
                 <a:cs typeface="IPAPGothic"/>
               </a:rPr>
-              <a:t>今のアプリの夜の処理(22時の出勤簿反映・3時のお客様取り込み)を止める</a:t>
+              <a:t>今のアプリの夜の処理(22時の出勤簿反映・3時のお客様取り込み）を止める</a:t>
             </a:r>
           </a:p>
         </p:txBody>
@@ -10537,7 +10537,7 @@
                 <a:ea typeface="IPAPGothic"/>
                 <a:cs typeface="IPAPGothic"/>
               </a:rPr>
-              <a:t>新しいアプリの夜の処理を始める(同じ日に行い、二重の反映を防ぎます)</a:t>
+              <a:t>新しいアプリの夜の処理を始める（同じ日に行い、二重の反映を防ぎます）</a:t>
             </a:r>
           </a:p>
         </p:txBody>
@@ -11881,7 +11881,7 @@
                 <a:ea typeface="IPAPGothic"/>
                 <a:cs typeface="IPAPGothic"/>
               </a:rPr>
-              <a:t>毎日自動で保存(14日分)。さらに過去7日の好きな時点に戻せます</a:t>
+              <a:t>毎日自動で保存(14日分）。さらに過去7日の好きな時点に戻せます</a:t>
             </a:r>
           </a:p>
         </p:txBody>
@@ -12205,7 +12205,7 @@
                 <a:ea typeface="IPAPGothic"/>
                 <a:cs typeface="IPAPGothic"/>
               </a:rPr>
-              <a:t>シートへの書き写し(選べます)</a:t>
+              <a:t>シートへの書き写し（選べます）</a:t>
             </a:r>
           </a:p>
         </p:txBody>
@@ -12247,7 +12247,7 @@
                 <a:ea typeface="IPAPGothic"/>
                 <a:cs typeface="IPAPGothic"/>
               </a:rPr>
-              <a:t>続ければ、切替後の記録もスプレッドシートに残ります(今のアプリ側の準備が必要です)</a:t>
+              <a:t>続ければ、切替後の記録もスプレッドシートに残ります（今のアプリ側の準備が必要です）</a:t>
             </a:r>
           </a:p>
         </p:txBody>
@@ -12333,7 +12333,7 @@
                 <a:ea typeface="IPAPGothic"/>
                 <a:cs typeface="IPAPGothic"/>
               </a:rPr>
-              <a:t>切り替え前に、画面(124場面)と計算を今のアプリと突き合わせて確かめています</a:t>
+              <a:t>切り替え前に、画面(124場面）と計算を今のアプリと突き合わせて確かめています</a:t>
             </a:r>
           </a:p>
         </p:txBody>
@@ -12666,7 +12666,7 @@
                 <a:ea typeface="IPAPGothic"/>
                 <a:cs typeface="IPAPGothic"/>
               </a:rPr>
-              <a:t>事務局ご担当者(切替日の連絡窓口・スタッフへのご案内役)</a:t>
+              <a:t>事務局ご担当者（切替日の連絡窓口・スタッフへのご案内役）</a:t>
             </a:r>
           </a:p>
         </p:txBody>
@@ -13472,7 +13472,7 @@
                 <a:ea typeface="IPAPGothic"/>
                 <a:cs typeface="IPAPGothic"/>
               </a:rPr>
-              <a:t>費用の目安(毎月のクラウド利用料)</a:t>
+              <a:t>費用の目安（毎月のクラウド利用料）</a:t>
             </a:r>
           </a:p>
         </p:txBody>
@@ -13748,7 +13748,7 @@
                 <a:ea typeface="IPAPGothic"/>
                 <a:cs typeface="IPAPGothic"/>
               </a:rPr>
-              <a:t>(約75〜105ドル)</a:t>
+              <a:t>（約75〜105ドル）</a:t>
             </a:r>
           </a:p>
         </p:txBody>
@@ -14027,7 +14027,7 @@
                 <a:ea typeface="IPAPGothic"/>
                 <a:cs typeface="IPAPGothic"/>
               </a:rPr>
-              <a:t>常に動いている処理(書き写し・メール)</a:t>
+              <a:t>常に動いている処理（書き写し・メール）</a:t>
             </a:r>
           </a:p>
         </p:txBody>
@@ -14285,7 +14285,7 @@
                 <a:ea typeface="IPAPGothic"/>
                 <a:cs typeface="IPAPGothic"/>
               </a:rPr>
-              <a:t>地図(道順)</a:t>
+              <a:t>地図（道順）</a:t>
             </a:r>
           </a:p>
         </p:txBody>
@@ -14413,7 +14413,7 @@
                 <a:ea typeface="IPAPGothic"/>
                 <a:cs typeface="IPAPGothic"/>
               </a:rPr>
-              <a:t>AI(日報の下書き・領収書の読み取り)</a:t>
+              <a:t>AI（日報の下書き・領収書の読み取り）</a:t>
             </a:r>
           </a:p>
         </p:txBody>
@@ -14539,7 +14539,7 @@
                 <a:ea typeface="IPAPGothic"/>
                 <a:cs typeface="IPAPGothic"/>
               </a:rPr>
-              <a:t>※ すべて2026年9月時点の見込み(目安)です。料金は変わることがあるため、本番の環境を作る前に正式な料金表で確かめます。</a:t>
+              <a:t>※ すべて2026年9月時点の見込み（目安）です。料金は変わることがあるため、本番の環境を作る前に正式な料金表で確かめます。</a:t>
             </a:r>
           </a:p>
         </p:txBody>
@@ -15099,7 +15099,7 @@
                 <a:ea typeface="IPAPGothic"/>
                 <a:cs typeface="IPAPGothic"/>
               </a:rPr>
-              <a:t>はい。今のパスワードを引き継ぎ、最初のログインのときに自動で、より安全な保存方式に置き換わります(切替前に実際に確かめます)。</a:t>
+              <a:t>はい。今のパスワードを引き継ぎ、最初のログインのときに自動で、より安全な保存方式に置き換わります（切替前に実際に確かめます）。</a:t>
             </a:r>
           </a:p>
         </p:txBody>
@@ -16447,7 +16447,7 @@
                 <a:ea typeface="IPAPGothic"/>
                 <a:cs typeface="IPAPGothic"/>
               </a:rPr>
-              <a:t>データは保管場所(データベースとそのバックアップ、領収書の画像)ごと、このアプリ専用の鍵で暗号化します。医療機関向けの国のガイドラインでも一般的な保護の水準です。</a:t>
+              <a:t>データベースとそのバックアップ、領収書の画像を、このアプリ専用の鍵で保管場所ごと暗号化します。医療機関向けの国のガイドラインでも一般的な保護の水準です。</a:t>
             </a:r>
           </a:p>
         </p:txBody>
@@ -16813,7 +16813,7 @@
                 <a:ea typeface="IPAPGothic"/>
                 <a:cs typeface="IPAPGothic"/>
               </a:rPr>
-              <a:t>これまでの分はそのまま見られます。切替後の記録もシートに書き写すかは選べます(続ける場合は今のアプリ側の準備が必要です)。</a:t>
+              <a:t>これまでの分はそのまま見られます。切替後の記録もシートに書き写すかは選べます（続ける場合は今のアプリ側の準備が必要です）。</a:t>
             </a:r>
           </a:p>
         </p:txBody>
@@ -18190,7 +18190,7 @@
                 <a:ea typeface="IPAPGothic"/>
                 <a:cs typeface="IPAPGothic"/>
               </a:rPr>
-              <a:t>会社の登録と最初の管理者をつくる手順の用意/スタッフの自宅住所(道順の出発点)の登録</a:t>
+              <a:t>会社の登録と最初の管理者をつくる手順の用意/スタッフの自宅住所（道順の出発点）の登録</a:t>
             </a:r>
           </a:p>
           <a:p>
@@ -18385,7 +18385,7 @@
                 <a:ea typeface="IPAPGothic"/>
                 <a:cs typeface="IPAPGothic"/>
               </a:rPr>
-              <a:t>いまの仕組み(スプレッドシート+Apps Script)の課題</a:t>
+              <a:t>いまの仕組み（スプレッドシート+Apps Script)の課題</a:t>
             </a:r>
           </a:p>
         </p:txBody>
@@ -20145,7 +20145,7 @@
                 <a:ea typeface="IPAPGothic"/>
                 <a:cs typeface="IPAPGothic"/>
               </a:rPr>
-              <a:t>Google Cloud(東京)で動きます</a:t>
+              <a:t>Google Cloud（東京）で動きます</a:t>
             </a:r>
           </a:p>
         </p:txBody>
@@ -21143,7 +21143,7 @@
                 <a:ea typeface="IPAPGothic"/>
                 <a:cs typeface="IPAPGothic"/>
               </a:rPr>
-              <a:t>左が今のアプリ、右が新しいアプリです。同じデータで撮影しました(架空の人物・住所)。</a:t>
+              <a:t>左が今のアプリ、右が新しいアプリです。同じデータで撮影しました（架空の人物・住所）。</a:t>
             </a:r>
           </a:p>
         </p:txBody>
@@ -22427,7 +22427,7 @@
                 <a:ea typeface="IPAPGothic"/>
                 <a:cs typeface="IPAPGothic"/>
               </a:rPr>
-              <a:t>日報(AIの下書き)</a:t>
+              <a:t>日報(AIの下書き）</a:t>
             </a:r>
           </a:p>
         </p:txBody>
@@ -22925,7 +22925,7 @@
                 <a:ea typeface="IPAPGothic"/>
                 <a:cs typeface="IPAPGothic"/>
               </a:rPr>
-              <a:t>出勤簿(週の一覧)</a:t>
+              <a:t>出勤簿（週の一覧）</a:t>
             </a:r>
           </a:p>
         </p:txBody>
@@ -23516,7 +23516,7 @@
                 <a:ea typeface="IPAPGothic"/>
                 <a:cs typeface="IPAPGothic"/>
               </a:rPr>
-              <a:t>記録はデータベースから直接読むので、スプレッドシートを開く待ち時間がなくなります(本番での体感は切替前に確認します)</a:t>
+              <a:t>記録はデータベースから直接読むので、スプレッドシートを開く待ち時間がなくなります（本番での体感は切替前に確認します）</a:t>
             </a:r>
           </a:p>
         </p:txBody>
@@ -23975,7 +23975,7 @@
                 <a:ea typeface="IPAPGothic"/>
                 <a:cs typeface="IPAPGothic"/>
               </a:rPr>
-              <a:t>例)朝、出勤前に「今日の予定」を開くとき/夕方に日報をまとめて保存するとき</a:t>
+              <a:t>例）朝、出勤前に「今日の予定」を開くとき/夕方に日報をまとめて保存するとき</a:t>
             </a:r>
           </a:p>
         </p:txBody>
@@ -24183,7 +24183,7 @@
         <p:spPr>
           <a:xfrm>
             <a:off x="548640" y="1371600"/>
-            <a:ext cx="11045952" cy="1691640"/>
+            <a:ext cx="11045952" cy="1536192"/>
           </a:xfrm>
           <a:prstGeom prst="roundRect">
             <a:avLst>
@@ -24226,7 +24226,7 @@
         </p:nvSpPr>
         <p:spPr>
           <a:xfrm>
-            <a:off x="777240" y="1851660"/>
+            <a:off x="777240" y="1773936"/>
             <a:ext cx="731520" cy="731520"/>
           </a:xfrm>
           <a:prstGeom prst="ellipse">
@@ -24324,7 +24324,7 @@
         <p:spPr>
           <a:xfrm>
             <a:off x="1691640" y="1938528"/>
-            <a:ext cx="9720072" cy="1051560"/>
+            <a:ext cx="9720072" cy="896112"/>
           </a:xfrm>
           <a:prstGeom prst="rect">
             <a:avLst/>
@@ -24352,7 +24352,7 @@
                 <a:ea typeface="IPAPGothic"/>
                 <a:cs typeface="IPAPGothic"/>
               </a:rPr>
-              <a:t>データベースとそのバックアップ、領収書の画像を丸ごと暗号化します(Google Cloudのディスク暗号化。鍵はGoogle Cloudの鍵管理サービスで厳重に管理)。医療機関向けの国のガイドライン(3省2ガイドライン)でも一般的な保護の水準です</a:t>
+              <a:t>データベースとそのバックアップ、領収書の画像を丸ごと暗号化します(Google Cloudの保存データの暗号化。鍵はGoogle Cloudの鍵管理サービスで厳重に管理）。医療機関向けの国のガイドライン(3省2ガイドライン）でも一般的な保護の水準です</a:t>
             </a:r>
           </a:p>
         </p:txBody>
@@ -24365,8 +24365,8 @@
         </p:nvSpPr>
         <p:spPr>
           <a:xfrm>
-            <a:off x="548640" y="3200400"/>
-            <a:ext cx="5440680" cy="1325880"/>
+            <a:off x="548640" y="3044952"/>
+            <a:ext cx="5440680" cy="1517904"/>
           </a:xfrm>
           <a:prstGeom prst="roundRect">
             <a:avLst>
@@ -24409,7 +24409,7 @@
         </p:nvSpPr>
         <p:spPr>
           <a:xfrm>
-            <a:off x="777240" y="3497580"/>
+            <a:off x="777240" y="3438144"/>
             <a:ext cx="731520" cy="731520"/>
           </a:xfrm>
           <a:prstGeom prst="ellipse">
@@ -24464,7 +24464,7 @@
         </p:nvSpPr>
         <p:spPr>
           <a:xfrm>
-            <a:off x="1691640" y="3310128"/>
+            <a:off x="1691640" y="3154680"/>
             <a:ext cx="4114800" cy="457200"/>
           </a:xfrm>
           <a:prstGeom prst="rect">
@@ -24506,8 +24506,8 @@
         </p:nvSpPr>
         <p:spPr>
           <a:xfrm>
-            <a:off x="1691640" y="3767328"/>
-            <a:ext cx="4114800" cy="685800"/>
+            <a:off x="1691640" y="3611880"/>
+            <a:ext cx="4114800" cy="877824"/>
           </a:xfrm>
           <a:prstGeom prst="rect">
             <a:avLst/>
@@ -24548,8 +24548,8 @@
         </p:nvSpPr>
         <p:spPr>
           <a:xfrm>
-            <a:off x="6153912" y="3200400"/>
-            <a:ext cx="5440680" cy="1325880"/>
+            <a:off x="6153912" y="3044952"/>
+            <a:ext cx="5440680" cy="1517904"/>
           </a:xfrm>
           <a:prstGeom prst="roundRect">
             <a:avLst>
@@ -24592,7 +24592,7 @@
         </p:nvSpPr>
         <p:spPr>
           <a:xfrm>
-            <a:off x="6382512" y="3497580"/>
+            <a:off x="6382512" y="3438144"/>
             <a:ext cx="731520" cy="731520"/>
           </a:xfrm>
           <a:prstGeom prst="ellipse">
@@ -24647,7 +24647,7 @@
         </p:nvSpPr>
         <p:spPr>
           <a:xfrm>
-            <a:off x="7296912" y="3310128"/>
+            <a:off x="7296912" y="3154680"/>
             <a:ext cx="4114800" cy="457200"/>
           </a:xfrm>
           <a:prstGeom prst="rect">
@@ -24676,7 +24676,7 @@
                 <a:ea typeface="IPAPGothic"/>
                 <a:cs typeface="IPAPGothic"/>
               </a:rPr>
-              <a:t>見られる人を制限</a:t>
+              <a:t>できることを役割で分ける</a:t>
             </a:r>
           </a:p>
         </p:txBody>
@@ -24689,8 +24689,8 @@
         </p:nvSpPr>
         <p:spPr>
           <a:xfrm>
-            <a:off x="7296912" y="3767328"/>
-            <a:ext cx="4114800" cy="685800"/>
+            <a:off x="7296912" y="3611880"/>
+            <a:ext cx="4114800" cy="877824"/>
           </a:xfrm>
           <a:prstGeom prst="rect">
             <a:avLst/>
@@ -24718,7 +24718,7 @@
                 <a:ea typeface="IPAPGothic"/>
                 <a:cs typeface="IPAPGothic"/>
               </a:rPr>
-              <a:t>スタッフが見て直せるのは自分の予定・出勤簿だけ。他の人の日報は上書きできません</a:t>
+              <a:t>スタッフが見て直せるのは自分の予定・出勤簿だけ。他の人の日報は上書きできません。管理の画面は管理者だけ</a:t>
             </a:r>
           </a:p>
         </p:txBody>
@@ -24731,8 +24731,8 @@
         </p:nvSpPr>
         <p:spPr>
           <a:xfrm>
-            <a:off x="548640" y="4663440"/>
-            <a:ext cx="5440680" cy="1325880"/>
+            <a:off x="548640" y="4636008"/>
+            <a:ext cx="5440680" cy="1517904"/>
           </a:xfrm>
           <a:prstGeom prst="roundRect">
             <a:avLst>
@@ -24775,7 +24775,7 @@
         </p:nvSpPr>
         <p:spPr>
           <a:xfrm>
-            <a:off x="777240" y="4960620"/>
+            <a:off x="777240" y="5029200"/>
             <a:ext cx="731520" cy="731520"/>
           </a:xfrm>
           <a:prstGeom prst="ellipse">
@@ -24830,7 +24830,7 @@
         </p:nvSpPr>
         <p:spPr>
           <a:xfrm>
-            <a:off x="1691640" y="4773168"/>
+            <a:off x="1691640" y="4745736"/>
             <a:ext cx="4114800" cy="457200"/>
           </a:xfrm>
           <a:prstGeom prst="rect">
@@ -24859,7 +24859,7 @@
                 <a:ea typeface="IPAPGothic"/>
                 <a:cs typeface="IPAPGothic"/>
               </a:rPr>
-              <a:t>誰がいつ見たかを記録</a:t>
+              <a:t>開いた人・変えた内容を記録</a:t>
             </a:r>
           </a:p>
         </p:txBody>
@@ -24872,8 +24872,8 @@
         </p:nvSpPr>
         <p:spPr>
           <a:xfrm>
-            <a:off x="1691640" y="5230368"/>
-            <a:ext cx="4114800" cy="685800"/>
+            <a:off x="1691640" y="5202936"/>
+            <a:ext cx="4114800" cy="877824"/>
           </a:xfrm>
           <a:prstGeom prst="rect">
             <a:avLst/>
@@ -24901,7 +24901,7 @@
                 <a:ea typeface="IPAPGothic"/>
                 <a:cs typeface="IPAPGothic"/>
               </a:rPr>
-              <a:t>誰が・いつ・何を見たか、何をしたかを残します。日報を書き直しても、前の内容が履歴に残ります</a:t>
+              <a:t>お客様の情報を誰がいつ開いたか、誰が何を変えたかを残します。日報を書き直しても、前の内容が履歴に残ります</a:t>
             </a:r>
           </a:p>
         </p:txBody>
@@ -24914,8 +24914,8 @@
         </p:nvSpPr>
         <p:spPr>
           <a:xfrm>
-            <a:off x="6153912" y="4663440"/>
-            <a:ext cx="5440680" cy="1325880"/>
+            <a:off x="6153912" y="4636008"/>
+            <a:ext cx="5440680" cy="1517904"/>
           </a:xfrm>
           <a:prstGeom prst="roundRect">
             <a:avLst>
@@ -24958,7 +24958,7 @@
         </p:nvSpPr>
         <p:spPr>
           <a:xfrm>
-            <a:off x="6382512" y="4960620"/>
+            <a:off x="6382512" y="5029200"/>
             <a:ext cx="731520" cy="731520"/>
           </a:xfrm>
           <a:prstGeom prst="ellipse">
@@ -25013,7 +25013,7 @@
         </p:nvSpPr>
         <p:spPr>
           <a:xfrm>
-            <a:off x="7296912" y="4773168"/>
+            <a:off x="7296912" y="4745736"/>
             <a:ext cx="4114800" cy="457200"/>
           </a:xfrm>
           <a:prstGeom prst="rect">
@@ -25055,8 +25055,8 @@
         </p:nvSpPr>
         <p:spPr>
           <a:xfrm>
-            <a:off x="7296912" y="5230368"/>
-            <a:ext cx="4114800" cy="685800"/>
+            <a:off x="7296912" y="5202936"/>
+            <a:ext cx="4114800" cy="877824"/>
           </a:xfrm>
           <a:prstGeom prst="rect">
             <a:avLst/>

--- a/doc/partner/新アプリ切替のご説明_キューテスト様.pptx
+++ b/doc/partner/新アプリ切替のご説明_キューテスト様.pptx
@@ -1784,7 +1784,7 @@
           <a:lstStyle/>
           <a:p>
             <a:r>
-              <a:t>ログイン画面と、今日の予定・道順の画面です。文字・ボタン・色まで今のアプリと同じにしてあります。</a:t>
+              <a:t>ログイン画面と、今日の予定・道順の画面です。新しいアプリは今の画面をもとに作っているので、使い方はほぼそのままです。スマホへの通知や管理者の方の画面など、新しく加わるものは、この後のページでご説明します。</a:t>
             </a:r>
           </a:p>
         </p:txBody>
@@ -10593,7 +10593,7 @@
                 <a:ea typeface="IPAPGothic"/>
                 <a:cs typeface="IPAPGothic"/>
               </a:rPr>
-              <a:t>画面の言葉・操作の流れ</a:t>
+              <a:t>画面の使い方（今の画面をもとに作っています）</a:t>
             </a:r>
           </a:p>
           <a:p>
@@ -16282,7 +16282,7 @@
                 <a:ea typeface="IPAPGothic"/>
                 <a:cs typeface="IPAPGothic"/>
               </a:rPr>
-              <a:t>画面の見た目・言葉・操作の順番は今と同じ。ログインも今のパスワードで。</a:t>
+              <a:t>今の画面をもとに作っているので、使い方はほぼそのまま。ログインも今のパスワードで。</a:t>
             </a:r>
           </a:p>
         </p:txBody>
@@ -22572,7 +22572,7 @@
                 <a:ea typeface="IPAPGothic"/>
                 <a:cs typeface="IPAPGothic"/>
               </a:rPr>
-              <a:t>今の画面と使い方はそのままに、中身を「会社の業務システム」として作り直したものです</a:t>
+              <a:t>今の画面をもとに、中身を「会社の業務システム」として作り直したものです</a:t>
             </a:r>
           </a:p>
         </p:txBody>
@@ -23658,7 +23658,7 @@
                 <a:ea typeface="IPAPGothic"/>
                 <a:cs typeface="IPAPGothic"/>
               </a:rPr>
-              <a:t>画面の見比べ</a:t>
+              <a:t>画面</a:t>
             </a:r>
           </a:p>
         </p:txBody>
@@ -23700,7 +23700,7 @@
                 <a:ea typeface="IPAPGothic"/>
                 <a:cs typeface="IPAPGothic"/>
               </a:rPr>
-              <a:t>スタッフの使い勝手は変わりません(1)</a:t>
+              <a:t>スタッフの使い方はほぼそのまま(1)</a:t>
             </a:r>
           </a:p>
         </p:txBody>
@@ -23826,7 +23826,7 @@
                 <a:ea typeface="IPAPGothic"/>
                 <a:cs typeface="IPAPGothic"/>
               </a:rPr>
-              <a:t>左が今のアプリ、右が新しいアプリです。同じデータで撮影しました（架空の人物・住所）。</a:t>
+              <a:t>左が今のアプリ、右が新しいアプリです（どちらも架空の人物・住所）。</a:t>
             </a:r>
           </a:p>
         </p:txBody>
@@ -24418,7 +24418,7 @@
                 <a:ea typeface="IPAPGothic"/>
                 <a:cs typeface="IPAPGothic"/>
               </a:rPr>
-              <a:t>画面の見比べ</a:t>
+              <a:t>画面</a:t>
             </a:r>
           </a:p>
         </p:txBody>
@@ -24460,7 +24460,7 @@
                 <a:ea typeface="IPAPGothic"/>
                 <a:cs typeface="IPAPGothic"/>
               </a:rPr>
-              <a:t>スタッフの使い勝手は変わりません(2)</a:t>
+              <a:t>スタッフの使い方はほぼそのまま(2)</a:t>
             </a:r>
           </a:p>
         </p:txBody>
@@ -24586,7 +24586,7 @@
                 <a:ea typeface="IPAPGothic"/>
                 <a:cs typeface="IPAPGothic"/>
               </a:rPr>
-              <a:t>お客様の情報や、AIが下書きする日報も、今と同じ流れで使えます。</a:t>
+              <a:t>お客様の情報や、AIが下書きする日報も、今の流れのまま使えます。</a:t>
             </a:r>
           </a:p>
         </p:txBody>
@@ -25178,7 +25178,7 @@
                 <a:ea typeface="IPAPGothic"/>
                 <a:cs typeface="IPAPGothic"/>
               </a:rPr>
-              <a:t>画面の見比べ</a:t>
+              <a:t>画面</a:t>
             </a:r>
           </a:p>
         </p:txBody>
@@ -25220,7 +25220,7 @@
                 <a:ea typeface="IPAPGothic"/>
                 <a:cs typeface="IPAPGothic"/>
               </a:rPr>
-              <a:t>スタッフの使い勝手は変わりません(3)</a:t>
+              <a:t>スタッフの使い方はほぼそのまま(3)</a:t>
             </a:r>
           </a:p>
         </p:txBody>
@@ -25346,7 +25346,7 @@
                 <a:ea typeface="IPAPGothic"/>
                 <a:cs typeface="IPAPGothic"/>
               </a:rPr>
-              <a:t>出勤簿も、週の一覧・1日の表示・修正の流れまで同じです。</a:t>
+              <a:t>出勤簿も、週の一覧・1日の表示・修正の流れを引き継いでいます。</a:t>
             </a:r>
           </a:p>
         </p:txBody>

--- a/doc/partner/新アプリ切替のご説明_キューテスト様.pptx
+++ b/doc/partner/新アプリ切替のご説明_キューテスト様.pptx
@@ -1364,7 +1364,7 @@
           <a:lstStyle/>
           <a:p>
             <a:r>
-              <a:t>内訳は東京リージョンの概算です。いちばん大きいのは、書き写しやパスワード再設定メールを送るために常に動かしている処理(約45〜55ドル)で、定期的に起動する方式に変えるなど、費用を下げる選択肢もあります。地図は、スタッフ20人が1日3件訪問する程度なら毎月の無料枠内に収まる見込みです。今のアプリ(Apps Script)にはサーバーの固定費がありませんが、新しいアプリでは上のクラウド利用料が毎月かかります。</a:t>
+              <a:t>内訳は東京リージョンの概算で、スタッフ10人・1人1日1〜2件の報告を前提にしています。いちばん大きいのは、書き写しやパスワード再設定メールを送るために常に動かしている処理(約45〜50ドル)で、定期的に起動する方式に変えるなど、費用を下げる選択肢もあります。データベースは今の規模に合わせた小さな構成(約12〜14ドル)で、利用が増えたら数分の再起動だけで大きくできます(データはそのまま)。地図は、スタッフ10人が1日3件訪問する程度なら毎月の無料枠内に収まる見込みです。AIは日報の下書きが大半で、月2〜8ドルほどの見込みです。今のアプリ(Apps Script)にはサーバーの固定費がありませんが、新しいアプリでは上のクラウド利用料が毎月かかります。</a:t>
             </a:r>
           </a:p>
         </p:txBody>
@@ -16983,7 +16983,7 @@
                 <a:ea typeface="IPAPGothic"/>
                 <a:cs typeface="IPAPGothic"/>
               </a:rPr>
-              <a:t>1.1万〜1.6万</a:t>
+              <a:t>0.9万〜1.2万</a:t>
             </a:r>
             <a:r>
               <a:rPr sz="2400" b="1">
@@ -17036,7 +17036,7 @@
                 <a:ea typeface="IPAPGothic"/>
                 <a:cs typeface="IPAPGothic"/>
               </a:rPr>
-              <a:t>（約75〜105ドル）</a:t>
+              <a:t>（約60〜80ドル）</a:t>
             </a:r>
           </a:p>
         </p:txBody>
@@ -17099,7 +17099,7 @@
                 <a:ea typeface="IPAPGothic"/>
                 <a:cs typeface="IPAPGothic"/>
               </a:rPr>
-              <a:t>地図・AIは使った分が別にかかります。</a:t>
+              <a:t>AIの利用料（見込み）を含みます。</a:t>
             </a:r>
           </a:p>
         </p:txBody>
@@ -17227,7 +17227,7 @@
                 <a:ea typeface="IPAPGothic"/>
                 <a:cs typeface="IPAPGothic"/>
               </a:rPr>
-              <a:t>30〜40ドル</a:t>
+              <a:t>12〜14ドル</a:t>
             </a:r>
           </a:p>
         </p:txBody>
@@ -17357,7 +17357,7 @@
                 <a:ea typeface="IPAPGothic"/>
                 <a:cs typeface="IPAPGothic"/>
               </a:rPr>
-              <a:t>45〜55ドル</a:t>
+              <a:t>45〜50ドル</a:t>
             </a:r>
           </a:p>
         </p:txBody>
@@ -17485,7 +17485,7 @@
                 <a:ea typeface="IPAPGothic"/>
                 <a:cs typeface="IPAPGothic"/>
               </a:rPr>
-              <a:t>0〜10ドル</a:t>
+              <a:t>0〜7ドル</a:t>
             </a:r>
           </a:p>
         </p:txBody>
@@ -17743,7 +17743,7 @@
                 <a:ea typeface="IPAPGothic"/>
                 <a:cs typeface="IPAPGothic"/>
               </a:rPr>
-              <a:t>使った分</a:t>
+              <a:t>2〜8ドル</a:t>
             </a:r>
           </a:p>
         </p:txBody>
@@ -17827,7 +17827,7 @@
                 <a:ea typeface="IPAPGothic"/>
                 <a:cs typeface="IPAPGothic"/>
               </a:rPr>
-              <a:t>※ すべて2026年9月時点の見込み（目安）です。料金は変わることがあるため、本番の環境を作る前に正式な料金表で確かめます。</a:t>
+              <a:t>※ 2026年9月27日時点の料金表からの見込み（目安）です。料金は変わることがあるため、本番の環境を作る前に確かめ直します。</a:t>
             </a:r>
           </a:p>
         </p:txBody>

--- a/doc/partner/新アプリ切替のご説明_キューテスト様.pptx
+++ b/doc/partner/新アプリ切替のご説明_キューテスト様.pptx
@@ -1364,7 +1364,7 @@
           <a:lstStyle/>
           <a:p>
             <a:r>
-              <a:t>内訳は東京リージョンの概算で、スタッフ10人・1人1日1〜2件の報告を前提にしています。いちばん大きいのは、書き写しやパスワード再設定メールを送るために常に動かしている処理(約45〜50ドル)で、定期的に起動する方式に変えるなど、費用を下げる選択肢もあります。データベースは今の規模に合わせた小さな構成(約12〜14ドル)で、利用が増えたら数分の再起動だけで大きくできます(データはそのまま)。地図は、スタッフ10人が1日3件訪問する程度なら毎月の無料枠内に収まる見込みです。AIは日報の下書きが大半で、月2〜8ドルほどの見込みです。今のアプリ(Apps Script)にはサーバーの固定費がありませんが、新しいアプリでは上のクラウド利用料が毎月かかります。</a:t>
+              <a:t>内訳は東京リージョンの概算で、スタッフ10人・1人1日1〜2件の報告を前提にしています。いちばん大きいのはデータベースで、今の規模に合わせた小さな構成(約12〜14ドル)です。利用が増えたら数分の再起動だけで大きくできます(データはそのまま)。スプレッドシートへの書き写し・パスワード再設定メール・スマホへの通知は、送るものができたときと10分ごとの見回りのときだけ短い時間動く処理で送るため、常に動かしておく費用がかからず、月0〜3ドルほど(無料枠の範囲に収まる見込み)です。操作からおよそ10〜30秒で届きます。地図は、スタッフ10人が1日3件訪問する程度なら毎月の無料枠内に収まる見込みです。AIは日報の下書きが大半で、月2〜8ドルほどの見込みです。今のアプリ(Apps Script)にはサーバーの固定費がありませんが、新しいアプリでは上のクラウド利用料が毎月かかります。</a:t>
             </a:r>
           </a:p>
         </p:txBody>
@@ -16975,7 +16975,7 @@
               <a:t>約</a:t>
             </a:r>
             <a:r>
-              <a:rPr sz="3800" b="1">
+              <a:rPr sz="3200" b="1">
                 <a:solidFill>
                   <a:srgbClr val="FFFFFF"/>
                 </a:solidFill>
@@ -16983,7 +16983,7 @@
                 <a:ea typeface="IPAPGothic"/>
                 <a:cs typeface="IPAPGothic"/>
               </a:rPr>
-              <a:t>0.9万〜1.2万</a:t>
+              <a:t>2,100〜4,700</a:t>
             </a:r>
             <a:r>
               <a:rPr sz="2400" b="1">
@@ -17036,7 +17036,7 @@
                 <a:ea typeface="IPAPGothic"/>
                 <a:cs typeface="IPAPGothic"/>
               </a:rPr>
-              <a:t>（約60〜80ドル）</a:t>
+              <a:t>（約14〜31ドル）</a:t>
             </a:r>
           </a:p>
         </p:txBody>
@@ -17315,7 +17315,7 @@
                 <a:ea typeface="IPAPGothic"/>
                 <a:cs typeface="IPAPGothic"/>
               </a:rPr>
-              <a:t>常に動いている処理（書き写し・メール）</a:t>
+              <a:t>書き写し・メール・通知の送信</a:t>
             </a:r>
           </a:p>
         </p:txBody>
@@ -17357,7 +17357,7 @@
                 <a:ea typeface="IPAPGothic"/>
                 <a:cs typeface="IPAPGothic"/>
               </a:rPr>
-              <a:t>45〜50ドル</a:t>
+              <a:t>0〜3ドル</a:t>
             </a:r>
           </a:p>
         </p:txBody>

--- a/doc/partner/新アプリ切替のご説明_キューテスト様.pptx
+++ b/doc/partner/新アプリ切替のご説明_キューテスト様.pptx
@@ -17785,7 +17785,7 @@
                 <a:ea typeface="IPAPGothic"/>
                 <a:cs typeface="IPAPGothic"/>
               </a:rPr>
-              <a:t>使いすぎを防ぐため、月3万円の予算に近づくとメールで知らせる設定も用意しています。</a:t>
+              <a:t>使いすぎを防ぐため、月1万円の予算に近づくとメールで知らせる設定も用意しています。</a:t>
             </a:r>
           </a:p>
         </p:txBody>

--- a/doc/partner/新アプリ切替のご説明_キューテスト様.pptx
+++ b/doc/partner/新アプリ切替のご説明_キューテスト様.pptx
@@ -804,7 +804,7 @@
           <a:lstStyle/>
           <a:p>
             <a:r>
-              <a:t>毎晩22時に今日の予定を出勤簿へ反映、3時に顧客CSVの取り込みという流れは今のアプリと同じ時刻です。19時の明日の予定のお知らせは、今LINE WORKSで届いているお知らせの代わりです。4時の整理は新しいアプリで加わった保守の処理です。お客様のデータの変化が大きすぎるときは、取り込まずに止めます。</a:t>
+              <a:t>毎晩22時に今日の予定を出勤簿へ反映するのは今のアプリと同じ時刻です。顧客CSVの取り込みは、今の毎晩3時から10分ごとに変わります。初めて訪問するお客様をRESERVAに登録した直後でも、すぐに日報を書けるようにするためです。急ぐときは、コーディネーター・管理者がお客様の画面の「今すぐ取り込む」で取り込めます。19時の明日の予定のお知らせは、今LINE WORKSで届いているお知らせの代わりです。4時の整理は新しいアプリで加わった保守の処理です。お客様のデータの変化が大きすぎるときは、取り込まずに止めます。</a:t>
             </a:r>
           </a:p>
         </p:txBody>
@@ -1714,7 +1714,7 @@
           <a:lstStyle/>
           <a:p>
             <a:r>
-              <a:t>スタッフはスマホで新しいアプリを開きます。アプリはGoogle Cloudの東京のデータセンターで動き、記録はデータベースにまとめて保管します。予定はこれまでどおりGoogleカレンダーから読み、お客様のCSVはGoogleドライブから毎晩取り込みます。スプレッドシートへの書き写しは、必要な間だけ続けることができます(続けるかどうかは選べます)。</a:t>
+              <a:t>スタッフはスマホで新しいアプリを開きます。アプリはGoogle Cloudの東京のデータセンターで動き、記録はデータベースにまとめて保管します。予定はこれまでどおりGoogleカレンダーから読み、お客様のCSVはGoogleドライブから10分ごとに取り込みます。スプレッドシートへの書き写しは、必要な間だけ続けることができます(続けるかどうかは選べます)。</a:t>
             </a:r>
           </a:p>
         </p:txBody>
@@ -8441,7 +8441,7 @@
                 <a:ea typeface="IPAPGothic"/>
                 <a:cs typeface="IPAPGothic"/>
               </a:rPr>
-              <a:t>良くなること④ 夜の自動処理</a:t>
+              <a:t>良くなること④ 自動で動く処理</a:t>
             </a:r>
           </a:p>
         </p:txBody>
@@ -8567,7 +8567,7 @@
                 <a:ea typeface="IPAPGothic"/>
                 <a:cs typeface="IPAPGothic"/>
               </a:rPr>
-              <a:t>今と同じ時刻の処理に、明日の予定のお知らせが加わります。失敗したら自動でやり直し、それでもだめならお知らせします。</a:t>
+              <a:t>お客様の取り込みは10分ごとに。明日の予定のお知らせも加わります。失敗したら自動でやり直し、それでもだめならお知らせします。</a:t>
             </a:r>
           </a:p>
         </p:txBody>
@@ -9023,7 +9023,7 @@
                 <a:ea typeface="IPAPGothic"/>
                 <a:cs typeface="IPAPGothic"/>
               </a:rPr>
-              <a:t>3:00</a:t>
+              <a:t>10分</a:t>
             </a:r>
           </a:p>
         </p:txBody>
@@ -9151,7 +9151,7 @@
                 <a:ea typeface="IPAPGothic"/>
                 <a:cs typeface="IPAPGothic"/>
               </a:rPr>
-              <a:t>Googleドライブの最新の顧客CSVを取り込み</a:t>
+              <a:t>Googleドライブの新しい顧客CSVを10分ごとに取り込み</a:t>
             </a:r>
           </a:p>
         </p:txBody>
@@ -10689,7 +10689,7 @@
                 <a:ea typeface="IPAPGothic"/>
                 <a:cs typeface="IPAPGothic"/>
               </a:rPr>
-              <a:t>毎晩の出勤簿への反映・顧客CSVの取り込み</a:t>
+              <a:t>毎晩の出勤簿への反映(お客様の取り込みは10分ごとに)</a:t>
             </a:r>
           </a:p>
           <a:p>
@@ -23330,7 +23330,7 @@
                 <a:ea typeface="IPAPGothic"/>
                 <a:cs typeface="IPAPGothic"/>
               </a:rPr>
-              <a:t>顧客CSVを毎晩取り込む</a:t>
+              <a:t>顧客CSVを10分ごとに取り込む</a:t>
             </a:r>
           </a:p>
         </p:txBody>

--- a/doc/partner/新アプリ切替のご説明_キューテスト様.pptx
+++ b/doc/partner/新アプリ切替のご説明_キューテスト様.pptx
@@ -664,7 +664,7 @@
           <a:lstStyle/>
           <a:p>
             <a:r>
-              <a:t>お預かりするデータは、保管場所ごと、つまりデータベースとそのバックアップ、領収書の画像を丸ごと、このアプリ専用の鍵で暗号化します。Google Cloud の保存データの暗号化の仕組みで、鍵は Google Cloud の鍵管理サービスで厳重に管理します。医療機関向けの国のガイドライン(3省2ガイドライン)でも一般的な保護の水準ですので、ご安心ください。ガイドラインの認証を受けたという意味ではありません。加えて、会社ごとのデータの分離、役割ごとにできることの制限、お客様の情報を誰がいつ開いたかの記録、ログインの回数の制限で守ります。パスワードの再設定は今と同じく、メールで届く6桁の番号(30分有効)で行います。</a:t>
+              <a:t>お預かりするデータは、保管場所ごと、つまりデータベースとそのバックアップ、領収書の画像を丸ごと、このアプリ専用の鍵で暗号化します。Google Cloud の保存データの暗号化の仕組みで、鍵は Google Cloud の鍵管理サービスで厳重に管理します。医療機関向けの国のガイドライン(3省2ガイドライン)でも一般的な保護の水準ですので、ご安心ください。ガイドラインの認証を受けたという意味ではありません。加えて、会社ごとのデータの分離、役割ごとにできることの制限、お客様の情報を誰がいつ開いたかの記録、ログインの回数の制限で守ります。ログインの回数の制限は、続けて間違えたアカウントを一時的にロックするものですが、いつも使っている端末(その端末で前にログインしたことがある場合)では、他の人が当てずっぽうにパスワードを試しても、ご本人がその端末から入れなくなることはありません。パスワードの再設定は、メールで届く8桁の番号(30分有効)で行います。今のアプリの6桁から増やして、当てずっぽうで当たりにくくしています。</a:t>
             </a:r>
           </a:p>
         </p:txBody>
@@ -1224,7 +1224,7 @@
           <a:lstStyle/>
           <a:p>
             <a:r>
-              <a:t>カレンダーと顧客CSVのフォルダは、新しいアプリ専用のGoogleのアカウント(サービス用のアドレス)に「閲覧」で共有していただく必要があります。共有先のアドレスは本番の環境を作った時点でお伝えします。パスワード再設定メールの送信元(Google Workspaceのメール送信の設定)もご相談します。</a:t>
+              <a:t>カレンダーと顧客CSVのフォルダは、新しいアプリ専用のGoogleのアカウント(サービス用のアドレス)に「閲覧」で共有していただく必要があります。共有先のアドレスは本番の環境の設定が済んだ時点でお伝えします。パスワード再設定メールの送信元(Google Workspaceのメール送信の設定)もご相談します。</a:t>
             </a:r>
           </a:p>
         </p:txBody>
@@ -1574,7 +1574,7 @@
           <a:lstStyle/>
           <a:p>
             <a:r>
-              <a:t>本番の環境の設定ファイルはできていますが、実際のGoogle Cloudでの構築と確認はこれからです。切替日の前に済ませます。</a:t>
+              <a:t>本番の環境(Google Cloud)は作成済みで、アプリ・データベース・お知らせや写しを送る処理の動作確認まで済んでいます(2026年9月末)。会社と最初の管理者の登録、夜の自動処理を動かす設定、各種の連携の設定はこれからで、切替日の前に済ませます。</a:t>
             </a:r>
           </a:p>
         </p:txBody>
@@ -7218,7 +7218,7 @@
                 <a:ea typeface="IPAPGothic"/>
                 <a:cs typeface="IPAPGothic"/>
               </a:rPr>
-              <a:t>続けて間違えると一時的にロックします。パスワードも安全な方式で保存します</a:t>
+              <a:t>続けて間違えると一時的にロック。いつも使う端末は、他の人の試行で締め出されません。パスワードは安全な方式で保存</a:t>
             </a:r>
           </a:p>
         </p:txBody>
@@ -10689,7 +10689,7 @@
                 <a:ea typeface="IPAPGothic"/>
                 <a:cs typeface="IPAPGothic"/>
               </a:rPr>
-              <a:t>毎晩の出勤簿への反映(お客様の取り込みは10分ごとに)</a:t>
+              <a:t>毎晩の出勤簿への反映（お客様の取り込みは10分ごとに）</a:t>
             </a:r>
           </a:p>
           <a:p>
@@ -11465,7 +11465,7 @@
                 <a:ea typeface="IPAPGothic"/>
                 <a:cs typeface="IPAPGothic"/>
               </a:rPr>
-              <a:t>本番の環境をつくる</a:t>
+              <a:t>本番の環境を仕上げる（会社・夜間処理の設定）</a:t>
             </a:r>
           </a:p>
           <a:p>
@@ -17827,7 +17827,7 @@
                 <a:ea typeface="IPAPGothic"/>
                 <a:cs typeface="IPAPGothic"/>
               </a:rPr>
-              <a:t>※ 2026年9月27日時点の料金表からの見込み（目安）です。料金は変わることがあるため、本番の環境を作る前に確かめ直します。</a:t>
+              <a:t>※ 2026年9月27日時点の料金表からの見込み（目安）です。料金は変わることがあるため、本番の運用を始める前に確かめ直します。</a:t>
             </a:r>
           </a:p>
         </p:txBody>
@@ -20197,7 +20197,7 @@
                 <a:ea typeface="IPAPGothic"/>
                 <a:cs typeface="IPAPGothic"/>
               </a:rPr>
-              <a:t>本番の環境づくり・データの取り込み</a:t>
+              <a:t>本番の環境の仕上げ・データの取り込み</a:t>
             </a:r>
           </a:p>
         </p:txBody>
@@ -20841,7 +20841,7 @@
                 <a:ea typeface="IPAPGothic"/>
                 <a:cs typeface="IPAPGothic"/>
               </a:rPr>
-              <a:t>本番の環境(Google Cloud)をつくり、実際の環境での動作を確かめる</a:t>
+              <a:t>本番の環境(Google Cloud)は作成済み。実際の環境で通しの動作を確かめる</a:t>
             </a:r>
           </a:p>
           <a:p>
